--- a/Slides/Discussions/TargetUseCase.pptx
+++ b/Slides/Discussions/TargetUseCase.pptx
@@ -247,7 +247,7 @@
           <a:p>
             <a:fld id="{0813ED7A-E0CC-A14D-8702-3DBB30C4345D}" type="datetimeFigureOut">
               <a:rPr lang="en-US" smtClean="0"/>
-              <a:t>9/18/24</a:t>
+              <a:t>10/8/25</a:t>
             </a:fld>
             <a:endParaRPr lang="en-US"/>
           </a:p>
@@ -560,6 +560,51 @@
           <a:p>
             <a:r>
               <a:rPr lang="en-US" dirty="0"/>
+              <a:t>Small Q: can I identify pregnant women in my store. </a:t>
+            </a:r>
+          </a:p>
+          <a:p>
+            <a:endParaRPr lang="en-US" dirty="0"/>
+          </a:p>
+          <a:p>
+            <a:r>
+              <a:rPr lang="en-US" dirty="0"/>
+              <a:t>Data: what population?  How to separate out the 0s and the 1s?</a:t>
+            </a:r>
+          </a:p>
+          <a:p>
+            <a:pPr marL="171450" indent="-171450">
+              <a:buFontTx/>
+              <a:buChar char="-"/>
+            </a:pPr>
+            <a:r>
+              <a:rPr lang="en-US" dirty="0"/>
+              <a:t>How far back? </a:t>
+            </a:r>
+          </a:p>
+          <a:p>
+            <a:pPr marL="171450" indent="-171450">
+              <a:buFontTx/>
+              <a:buChar char="-"/>
+            </a:pPr>
+            <a:r>
+              <a:rPr lang="en-US" dirty="0"/>
+              <a:t>What products? </a:t>
+            </a:r>
+          </a:p>
+          <a:p>
+            <a:pPr marL="171450" indent="-171450">
+              <a:buFontTx/>
+              <a:buChar char="-"/>
+            </a:pPr>
+            <a:endParaRPr lang="en-US" dirty="0"/>
+          </a:p>
+          <a:p>
+            <a:endParaRPr lang="en-US" dirty="0"/>
+          </a:p>
+          <a:p>
+            <a:r>
+              <a:rPr lang="en-US" dirty="0"/>
               <a:t>How accurate did their model have to be?</a:t>
             </a:r>
           </a:p>
@@ -781,7 +826,7 @@
           <a:p>
             <a:fld id="{59F43C82-9B9B-AC4F-98CD-0ADC587116F3}" type="datetime1">
               <a:rPr lang="en-US" smtClean="0"/>
-              <a:t>9/18/24</a:t>
+              <a:t>10/8/25</a:t>
             </a:fld>
             <a:endParaRPr lang="en-US"/>
           </a:p>
@@ -997,7 +1042,7 @@
           <a:p>
             <a:fld id="{F1178AE4-2A10-5F42-AC8C-4BD01A79A0D1}" type="datetime1">
               <a:rPr lang="en-US" smtClean="0"/>
-              <a:t>9/18/24</a:t>
+              <a:t>10/8/25</a:t>
             </a:fld>
             <a:endParaRPr lang="en-US"/>
           </a:p>
@@ -1193,7 +1238,7 @@
           <a:p>
             <a:fld id="{E675C519-8308-2748-8B0B-F7B055AE4297}" type="datetime1">
               <a:rPr lang="en-US" smtClean="0"/>
-              <a:t>9/18/24</a:t>
+              <a:t>10/8/25</a:t>
             </a:fld>
             <a:endParaRPr lang="en-US"/>
           </a:p>
@@ -1445,7 +1490,7 @@
           <a:p>
             <a:fld id="{ACD0997E-0CDD-7541-9D88-20A562751868}" type="datetime1">
               <a:rPr lang="en-US" smtClean="0"/>
-              <a:t>9/18/24</a:t>
+              <a:t>10/8/25</a:t>
             </a:fld>
             <a:endParaRPr lang="en-US"/>
           </a:p>
@@ -1697,7 +1742,7 @@
           <a:p>
             <a:fld id="{AC053AD8-5CA7-3F49-B495-B884AFEE8A16}" type="datetime1">
               <a:rPr lang="en-US" smtClean="0"/>
-              <a:t>9/18/24</a:t>
+              <a:t>10/8/25</a:t>
             </a:fld>
             <a:endParaRPr lang="en-US"/>
           </a:p>
@@ -1866,7 +1911,7 @@
           <a:p>
             <a:fld id="{6C751CFE-5FBC-BA47-8777-CE847435DFFA}" type="datetime1">
               <a:rPr lang="en-US" smtClean="0"/>
-              <a:t>9/18/24</a:t>
+              <a:t>10/8/25</a:t>
             </a:fld>
             <a:endParaRPr lang="en-US"/>
           </a:p>
@@ -2091,7 +2136,7 @@
           <a:p>
             <a:fld id="{7A75583E-7D50-3C4A-8A37-9B3FE7B04D6C}" type="datetime1">
               <a:rPr lang="en-US" smtClean="0"/>
-              <a:t>9/18/24</a:t>
+              <a:t>10/8/25</a:t>
             </a:fld>
             <a:endParaRPr lang="en-US"/>
           </a:p>
@@ -2370,7 +2415,7 @@
           <a:p>
             <a:fld id="{EDF769E5-24F5-8F43-8EA5-E948B75DD02E}" type="datetime1">
               <a:rPr lang="en-US" smtClean="0"/>
-              <a:t>9/18/24</a:t>
+              <a:t>10/8/25</a:t>
             </a:fld>
             <a:endParaRPr lang="en-US"/>
           </a:p>
@@ -2944,7 +2989,7 @@
           <a:p>
             <a:fld id="{8D5B1BC2-7DC9-274F-9AA5-41AD410B73E8}" type="datetime1">
               <a:rPr lang="en-US" smtClean="0"/>
-              <a:t>9/18/24</a:t>
+              <a:t>10/8/25</a:t>
             </a:fld>
             <a:endParaRPr lang="en-US"/>
           </a:p>
@@ -3411,7 +3456,7 @@
           <a:p>
             <a:fld id="{B7F9541A-B732-0842-A74F-0C72DB237063}" type="datetime1">
               <a:rPr lang="en-US" smtClean="0"/>
-              <a:t>9/18/24</a:t>
+              <a:t>10/8/25</a:t>
             </a:fld>
             <a:endParaRPr lang="en-US"/>
           </a:p>
@@ -3546,7 +3591,7 @@
           <a:p>
             <a:fld id="{F397BA72-28C9-9A46-8637-8A409BF0CACF}" type="datetime1">
               <a:rPr lang="en-US" smtClean="0"/>
-              <a:t>9/18/24</a:t>
+              <a:t>10/8/25</a:t>
             </a:fld>
             <a:endParaRPr lang="en-US"/>
           </a:p>
@@ -3689,7 +3734,7 @@
           <a:p>
             <a:fld id="{C54BA4BC-FC40-B844-8CA3-66DD08AD127A}" type="datetime1">
               <a:rPr lang="en-US" smtClean="0"/>
-              <a:t>9/18/24</a:t>
+              <a:t>10/8/25</a:t>
             </a:fld>
             <a:endParaRPr lang="en-US"/>
           </a:p>
@@ -3982,7 +4027,7 @@
           <a:p>
             <a:fld id="{A0381634-E977-7043-B341-F77FCA8D6817}" type="datetime1">
               <a:rPr lang="en-US" smtClean="0"/>
-              <a:t>9/18/24</a:t>
+              <a:t>10/8/25</a:t>
             </a:fld>
             <a:endParaRPr lang="en-US"/>
           </a:p>
@@ -4257,7 +4302,7 @@
           <a:p>
             <a:fld id="{C242C96D-D083-B04B-BE8C-D38697A2B148}" type="datetime1">
               <a:rPr lang="en-US" smtClean="0"/>
-              <a:t>9/18/24</a:t>
+              <a:t>10/8/25</a:t>
             </a:fld>
             <a:endParaRPr lang="en-US"/>
           </a:p>
@@ -4547,7 +4592,7 @@
           <a:p>
             <a:fld id="{C3BC7800-B276-A64A-8AB0-19972C98F17B}" type="datetime1">
               <a:rPr lang="en-US" smtClean="0"/>
-              <a:t>9/18/24</a:t>
+              <a:t>10/8/25</a:t>
             </a:fld>
             <a:endParaRPr lang="en-US"/>
           </a:p>
@@ -5193,10 +5238,25 @@
             </a:r>
           </a:p>
           <a:p>
+            <a:pPr marL="0" indent="0">
+              <a:buNone/>
+            </a:pPr>
+            <a:endParaRPr lang="en-US" sz="1800" dirty="0"/>
+          </a:p>
+          <a:p>
             <a:pPr>
               <a:buFont typeface="Arial" panose="020B0604020202020204" pitchFamily="34" charset="0"/>
               <a:buChar char="•"/>
             </a:pPr>
+            <a:r>
+              <a:rPr lang="en-US" sz="1800" dirty="0"/>
+              <a:t>What were the errors (false positive and negative) and risks of each type of error.   Which is worse? </a:t>
+            </a:r>
+          </a:p>
+          <a:p>
+            <a:pPr marL="0" indent="0">
+              <a:buNone/>
+            </a:pPr>
             <a:endParaRPr lang="en-US" sz="1800" dirty="0"/>
           </a:p>
           <a:p>
@@ -5206,23 +5266,7 @@
             </a:pPr>
             <a:r>
               <a:rPr lang="en-US" sz="1800" dirty="0"/>
-              <a:t>What were the errors (false positive and negative) and risks of each type of error.   </a:t>
-            </a:r>
-          </a:p>
-          <a:p>
-            <a:pPr marL="0" indent="0">
-              <a:buNone/>
-            </a:pPr>
-            <a:endParaRPr lang="en-US" sz="1800" dirty="0"/>
-          </a:p>
-          <a:p>
-            <a:pPr>
-              <a:buFont typeface="Arial" panose="020B0604020202020204" pitchFamily="34" charset="0"/>
-              <a:buChar char="•"/>
-            </a:pPr>
-            <a:r>
-              <a:rPr lang="en-US" sz="1800" dirty="0"/>
-              <a:t>Discuss the ethical considerations. Where should the line be drawn in targeted marketing? </a:t>
+              <a:t>Discuss the ethical considerations. Where should the line be drawn in targeted marketing? (on a scale of 1 to 10 where do you stand?) </a:t>
             </a:r>
           </a:p>
           <a:p>
